--- a/.lessons/36 Packages Shopping Cart/3 Package Installation and setup/1.pptx
+++ b/.lessons/36 Packages Shopping Cart/3 Package Installation and setup/1.pptx
@@ -6,8 +6,7 @@
   </p:sldMasterIdLst>
   <p:sldIdLst>
     <p:sldId id="402" r:id="rId2"/>
-    <p:sldId id="403" r:id="rId3"/>
-    <p:sldId id="400" r:id="rId4"/>
+    <p:sldId id="400" r:id="rId3"/>
   </p:sldIdLst>
   <p:sldSz cx="12192000" cy="6858000"/>
   <p:notesSz cx="6858000" cy="9144000"/>
@@ -261,7 +260,7 @@
           <a:p>
             <a:fld id="{3E102D2E-813C-461C-9963-687A650C48C0}" type="datetimeFigureOut">
               <a:rPr lang="en-US" smtClean="0"/>
-              <a:t>5/23/2025</a:t>
+              <a:t>6/19/2025</a:t>
             </a:fld>
             <a:endParaRPr lang="en-US"/>
           </a:p>
@@ -459,7 +458,7 @@
           <a:p>
             <a:fld id="{3E102D2E-813C-461C-9963-687A650C48C0}" type="datetimeFigureOut">
               <a:rPr lang="en-US" smtClean="0"/>
-              <a:t>5/23/2025</a:t>
+              <a:t>6/19/2025</a:t>
             </a:fld>
             <a:endParaRPr lang="en-US"/>
           </a:p>
@@ -667,7 +666,7 @@
           <a:p>
             <a:fld id="{3E102D2E-813C-461C-9963-687A650C48C0}" type="datetimeFigureOut">
               <a:rPr lang="en-US" smtClean="0"/>
-              <a:t>5/23/2025</a:t>
+              <a:t>6/19/2025</a:t>
             </a:fld>
             <a:endParaRPr lang="en-US"/>
           </a:p>
@@ -865,7 +864,7 @@
           <a:p>
             <a:fld id="{3E102D2E-813C-461C-9963-687A650C48C0}" type="datetimeFigureOut">
               <a:rPr lang="en-US" smtClean="0"/>
-              <a:t>5/23/2025</a:t>
+              <a:t>6/19/2025</a:t>
             </a:fld>
             <a:endParaRPr lang="en-US"/>
           </a:p>
@@ -1140,7 +1139,7 @@
           <a:p>
             <a:fld id="{3E102D2E-813C-461C-9963-687A650C48C0}" type="datetimeFigureOut">
               <a:rPr lang="en-US" smtClean="0"/>
-              <a:t>5/23/2025</a:t>
+              <a:t>6/19/2025</a:t>
             </a:fld>
             <a:endParaRPr lang="en-US"/>
           </a:p>
@@ -1405,7 +1404,7 @@
           <a:p>
             <a:fld id="{3E102D2E-813C-461C-9963-687A650C48C0}" type="datetimeFigureOut">
               <a:rPr lang="en-US" smtClean="0"/>
-              <a:t>5/23/2025</a:t>
+              <a:t>6/19/2025</a:t>
             </a:fld>
             <a:endParaRPr lang="en-US"/>
           </a:p>
@@ -1817,7 +1816,7 @@
           <a:p>
             <a:fld id="{3E102D2E-813C-461C-9963-687A650C48C0}" type="datetimeFigureOut">
               <a:rPr lang="en-US" smtClean="0"/>
-              <a:t>5/23/2025</a:t>
+              <a:t>6/19/2025</a:t>
             </a:fld>
             <a:endParaRPr lang="en-US"/>
           </a:p>
@@ -1958,7 +1957,7 @@
           <a:p>
             <a:fld id="{3E102D2E-813C-461C-9963-687A650C48C0}" type="datetimeFigureOut">
               <a:rPr lang="en-US" smtClean="0"/>
-              <a:t>5/23/2025</a:t>
+              <a:t>6/19/2025</a:t>
             </a:fld>
             <a:endParaRPr lang="en-US"/>
           </a:p>
@@ -2071,7 +2070,7 @@
           <a:p>
             <a:fld id="{3E102D2E-813C-461C-9963-687A650C48C0}" type="datetimeFigureOut">
               <a:rPr lang="en-US" smtClean="0"/>
-              <a:t>5/23/2025</a:t>
+              <a:t>6/19/2025</a:t>
             </a:fld>
             <a:endParaRPr lang="en-US"/>
           </a:p>
@@ -2382,7 +2381,7 @@
           <a:p>
             <a:fld id="{3E102D2E-813C-461C-9963-687A650C48C0}" type="datetimeFigureOut">
               <a:rPr lang="en-US" smtClean="0"/>
-              <a:t>5/23/2025</a:t>
+              <a:t>6/19/2025</a:t>
             </a:fld>
             <a:endParaRPr lang="en-US"/>
           </a:p>
@@ -2670,7 +2669,7 @@
           <a:p>
             <a:fld id="{3E102D2E-813C-461C-9963-687A650C48C0}" type="datetimeFigureOut">
               <a:rPr lang="en-US" smtClean="0"/>
-              <a:t>5/23/2025</a:t>
+              <a:t>6/19/2025</a:t>
             </a:fld>
             <a:endParaRPr lang="en-US"/>
           </a:p>
@@ -2911,7 +2910,7 @@
           <a:p>
             <a:fld id="{3E102D2E-813C-461C-9963-687A650C48C0}" type="datetimeFigureOut">
               <a:rPr lang="en-US" smtClean="0"/>
-              <a:t>5/23/2025</a:t>
+              <a:t>6/19/2025</a:t>
             </a:fld>
             <a:endParaRPr lang="en-US"/>
           </a:p>
@@ -3349,7 +3348,7 @@
         <p:spPr>
           <a:xfrm>
             <a:off x="217714" y="255046"/>
-            <a:ext cx="11756571" cy="355354"/>
+            <a:ext cx="11756571" cy="1255600"/>
           </a:xfrm>
           <a:prstGeom prst="rect">
             <a:avLst/>
@@ -3369,21 +3368,140 @@
               <a:buNone/>
             </a:pPr>
             <a:r>
-              <a:rPr kumimoji="0" lang="en-US" altLang="en-US" sz="1300" b="0" i="0" u="none" strike="noStrike" cap="none" normalizeH="0" baseline="0">
-                <a:ln>
-                  <a:noFill/>
-                </a:ln>
-                <a:solidFill>
-                  <a:schemeClr val="tx1"/>
-                </a:solidFill>
-                <a:effectLst/>
+              <a:rPr lang="az-Latn-AZ" altLang="en-US" sz="1300">
                 <a:latin typeface="Arial" panose="020B0604020202020204" pitchFamily="34" charset="0"/>
               </a:rPr>
-              <a:t>.</a:t>
-            </a:r>
-          </a:p>
-        </p:txBody>
-      </p:sp>
+              <a:t>Səbətə məhsul əlavə etmək üçün `</a:t>
+            </a:r>
+            <a:r>
+              <a:rPr lang="az-Latn-AZ" altLang="en-US" sz="1300" b="1">
+                <a:latin typeface="Arial" panose="020B0604020202020204" pitchFamily="34" charset="0"/>
+              </a:rPr>
+              <a:t>https://github.com/anayarojo/laravel-shopping-cart</a:t>
+            </a:r>
+            <a:r>
+              <a:rPr lang="az-Latn-AZ" altLang="en-US" sz="1300">
+                <a:latin typeface="Arial" panose="020B0604020202020204" pitchFamily="34" charset="0"/>
+              </a:rPr>
+              <a:t>` linkinə daxil olaraq hazır paket quraşdırırıq. Bu paket vasitəsi ilə səbətə yeni </a:t>
+            </a:r>
+            <a:r>
+              <a:rPr lang="az-Latn-AZ" altLang="en-US" sz="1300" b="1">
+                <a:latin typeface="Arial" panose="020B0604020202020204" pitchFamily="34" charset="0"/>
+              </a:rPr>
+              <a:t>item</a:t>
+            </a:r>
+            <a:r>
+              <a:rPr lang="az-Latn-AZ" altLang="en-US" sz="1300">
+                <a:latin typeface="Arial" panose="020B0604020202020204" pitchFamily="34" charset="0"/>
+              </a:rPr>
+              <a:t> əlavə edildikdə həmin məhsul </a:t>
+            </a:r>
+            <a:r>
+              <a:rPr lang="az-Latn-AZ" altLang="en-US" sz="1300" b="1">
+                <a:latin typeface="Arial" panose="020B0604020202020204" pitchFamily="34" charset="0"/>
+              </a:rPr>
+              <a:t>Sessiyada</a:t>
+            </a:r>
+            <a:r>
+              <a:rPr lang="az-Latn-AZ" altLang="en-US" sz="1300">
+                <a:latin typeface="Arial" panose="020B0604020202020204" pitchFamily="34" charset="0"/>
+              </a:rPr>
+              <a:t> saxlanılacaq və sonra isə bu məhsulu </a:t>
+            </a:r>
+            <a:r>
+              <a:rPr lang="az-Latn-AZ" altLang="en-US" sz="1300" b="1">
+                <a:latin typeface="Arial" panose="020B0604020202020204" pitchFamily="34" charset="0"/>
+              </a:rPr>
+              <a:t>sessiyadan</a:t>
+            </a:r>
+            <a:r>
+              <a:rPr lang="az-Latn-AZ" altLang="en-US" sz="1300">
+                <a:latin typeface="Arial" panose="020B0604020202020204" pitchFamily="34" charset="0"/>
+              </a:rPr>
+              <a:t> əldə edərək </a:t>
+            </a:r>
+            <a:r>
+              <a:rPr lang="az-Latn-AZ" altLang="en-US" sz="1300" b="1">
+                <a:latin typeface="Arial" panose="020B0604020202020204" pitchFamily="34" charset="0"/>
+              </a:rPr>
+              <a:t>`/cart</a:t>
+            </a:r>
+            <a:r>
+              <a:rPr lang="az-Latn-AZ" altLang="en-US" sz="1300">
+                <a:latin typeface="Arial" panose="020B0604020202020204" pitchFamily="34" charset="0"/>
+              </a:rPr>
+              <a:t>`  şablonuna göndərəcəyik.</a:t>
+            </a:r>
+          </a:p>
+          <a:p>
+            <a:pPr>
+              <a:lnSpc>
+                <a:spcPct val="150000"/>
+              </a:lnSpc>
+              <a:buNone/>
+            </a:pPr>
+            <a:endParaRPr kumimoji="0" lang="az-Latn-AZ" altLang="en-US" sz="1300" b="0" i="0" u="none" strike="noStrike" cap="none" normalizeH="0" baseline="0">
+              <a:ln>
+                <a:noFill/>
+              </a:ln>
+              <a:solidFill>
+                <a:schemeClr val="tx1"/>
+              </a:solidFill>
+              <a:effectLst/>
+              <a:latin typeface="Arial" panose="020B0604020202020204" pitchFamily="34" charset="0"/>
+            </a:endParaRPr>
+          </a:p>
+          <a:p>
+            <a:pPr>
+              <a:lnSpc>
+                <a:spcPct val="150000"/>
+              </a:lnSpc>
+              <a:buNone/>
+            </a:pPr>
+            <a:endParaRPr kumimoji="0" lang="en-US" altLang="en-US" sz="1300" b="0" i="0" u="none" strike="noStrike" cap="none" normalizeH="0" baseline="0">
+              <a:ln>
+                <a:noFill/>
+              </a:ln>
+              <a:solidFill>
+                <a:schemeClr val="tx1"/>
+              </a:solidFill>
+              <a:effectLst/>
+              <a:latin typeface="Arial" panose="020B0604020202020204" pitchFamily="34" charset="0"/>
+            </a:endParaRPr>
+          </a:p>
+        </p:txBody>
+      </p:sp>
+      <p:pic>
+        <p:nvPicPr>
+          <p:cNvPr id="4" name="Picture 3">
+            <a:extLst>
+              <a:ext uri="{FF2B5EF4-FFF2-40B4-BE49-F238E27FC236}">
+                <a16:creationId xmlns:a16="http://schemas.microsoft.com/office/drawing/2014/main" id="{2258B416-9D8E-02FF-D455-B40F80F617E4}"/>
+              </a:ext>
+            </a:extLst>
+          </p:cNvPr>
+          <p:cNvPicPr>
+            <a:picLocks noChangeAspect="1"/>
+          </p:cNvPicPr>
+          <p:nvPr/>
+        </p:nvPicPr>
+        <p:blipFill>
+          <a:blip r:embed="rId2"/>
+          <a:stretch>
+            <a:fillRect/>
+          </a:stretch>
+        </p:blipFill>
+        <p:spPr>
+          <a:xfrm>
+            <a:off x="2796322" y="1726163"/>
+            <a:ext cx="9395678" cy="4848747"/>
+          </a:xfrm>
+          <a:prstGeom prst="rect">
+            <a:avLst/>
+          </a:prstGeom>
+        </p:spPr>
+      </p:pic>
     </p:spTree>
     <p:extLst>
       <p:ext uri="{BB962C8B-B14F-4D97-AF65-F5344CB8AC3E}">
@@ -3398,92 +3516,6 @@
 </file>
 
 <file path=ppt/slides/slide2.xml><?xml version="1.0" encoding="utf-8"?>
-<p:sld xmlns:a="http://schemas.openxmlformats.org/drawingml/2006/main" xmlns:r="http://schemas.openxmlformats.org/officeDocument/2006/relationships" xmlns:p="http://schemas.openxmlformats.org/presentationml/2006/main">
-  <p:cSld>
-    <p:spTree>
-      <p:nvGrpSpPr>
-        <p:cNvPr id="1" name="">
-          <a:extLst>
-            <a:ext uri="{FF2B5EF4-FFF2-40B4-BE49-F238E27FC236}">
-              <a16:creationId xmlns:a16="http://schemas.microsoft.com/office/drawing/2014/main" id="{F6C13FCC-E5C4-2350-20C6-89DF22D1F3E0}"/>
-            </a:ext>
-          </a:extLst>
-        </p:cNvPr>
-        <p:cNvGrpSpPr/>
-        <p:nvPr/>
-      </p:nvGrpSpPr>
-      <p:grpSpPr>
-        <a:xfrm>
-          <a:off x="0" y="0"/>
-          <a:ext cx="0" cy="0"/>
-          <a:chOff x="0" y="0"/>
-          <a:chExt cx="0" cy="0"/>
-        </a:xfrm>
-      </p:grpSpPr>
-      <p:sp>
-        <p:nvSpPr>
-          <p:cNvPr id="3" name="TextBox 2">
-            <a:extLst>
-              <a:ext uri="{FF2B5EF4-FFF2-40B4-BE49-F238E27FC236}">
-                <a16:creationId xmlns:a16="http://schemas.microsoft.com/office/drawing/2014/main" id="{81782941-0DB4-B0DA-A36A-31CA5EC69992}"/>
-              </a:ext>
-            </a:extLst>
-          </p:cNvPr>
-          <p:cNvSpPr txBox="1"/>
-          <p:nvPr/>
-        </p:nvSpPr>
-        <p:spPr>
-          <a:xfrm>
-            <a:off x="217714" y="255046"/>
-            <a:ext cx="11756571" cy="355354"/>
-          </a:xfrm>
-          <a:prstGeom prst="rect">
-            <a:avLst/>
-          </a:prstGeom>
-          <a:noFill/>
-        </p:spPr>
-        <p:txBody>
-          <a:bodyPr wrap="square">
-            <a:spAutoFit/>
-          </a:bodyPr>
-          <a:lstStyle/>
-          <a:p>
-            <a:pPr>
-              <a:lnSpc>
-                <a:spcPct val="150000"/>
-              </a:lnSpc>
-              <a:buNone/>
-            </a:pPr>
-            <a:r>
-              <a:rPr kumimoji="0" lang="en-US" altLang="en-US" sz="1300" b="0" i="0" u="none" strike="noStrike" cap="none" normalizeH="0" baseline="0">
-                <a:ln>
-                  <a:noFill/>
-                </a:ln>
-                <a:solidFill>
-                  <a:schemeClr val="tx1"/>
-                </a:solidFill>
-                <a:effectLst/>
-                <a:latin typeface="Arial" panose="020B0604020202020204" pitchFamily="34" charset="0"/>
-              </a:rPr>
-              <a:t>.</a:t>
-            </a:r>
-          </a:p>
-        </p:txBody>
-      </p:sp>
-    </p:spTree>
-    <p:extLst>
-      <p:ext uri="{BB962C8B-B14F-4D97-AF65-F5344CB8AC3E}">
-        <p14:creationId xmlns:p14="http://schemas.microsoft.com/office/powerpoint/2010/main" val="2667607345"/>
-      </p:ext>
-    </p:extLst>
-  </p:cSld>
-  <p:clrMapOvr>
-    <a:masterClrMapping/>
-  </p:clrMapOvr>
-</p:sld>
-</file>
-
-<file path=ppt/slides/slide3.xml><?xml version="1.0" encoding="utf-8"?>
 <p:sld xmlns:a="http://schemas.openxmlformats.org/drawingml/2006/main" xmlns:r="http://schemas.openxmlformats.org/officeDocument/2006/relationships" xmlns:p="http://schemas.openxmlformats.org/presentationml/2006/main">
   <p:cSld>
     <p:spTree>
